--- a/slides/ws1-executive-solution-deck.pptx
+++ b/slides/ws1-executive-solution-deck.pptx
@@ -19710,7 +19710,7 @@
               <a:srgbClr val="1A73E8"/>
             </a:solidFill>
             <a:prstDash val="solid"/>
-            <a:tailEnd type="arrow"/>
+            <a:tailEnd type="arrow" w="sm" len="sm"/>
           </a:ln>
         </p:spPr>
       </p:sp>
@@ -19734,7 +19734,7 @@
               <a:srgbClr val="1A73E8"/>
             </a:solidFill>
             <a:prstDash val="solid"/>
-            <a:tailEnd type="arrow"/>
+            <a:tailEnd type="arrow" w="sm" len="sm"/>
           </a:ln>
         </p:spPr>
       </p:sp>
@@ -19758,7 +19758,7 @@
               <a:srgbClr val="1E8E3E"/>
             </a:solidFill>
             <a:prstDash val="solid"/>
-            <a:tailEnd type="arrow"/>
+            <a:tailEnd type="arrow" w="sm" len="sm"/>
           </a:ln>
         </p:spPr>
       </p:sp>
@@ -19782,7 +19782,7 @@
               <a:srgbClr val="1E8E3E"/>
             </a:solidFill>
             <a:prstDash val="solid"/>
-            <a:tailEnd type="arrow"/>
+            <a:tailEnd type="arrow" w="sm" len="sm"/>
           </a:ln>
         </p:spPr>
       </p:sp>
@@ -19806,7 +19806,7 @@
               <a:srgbClr val="1E8E3E"/>
             </a:solidFill>
             <a:prstDash val="solid"/>
-            <a:tailEnd type="arrow"/>
+            <a:tailEnd type="arrow" w="sm" len="sm"/>
           </a:ln>
         </p:spPr>
       </p:sp>
